--- a/phase2_output/dl_phase2_review_15slides.pptx
+++ b/phase2_output/dl_phase2_review_15slides.pptx
@@ -6003,7 +6003,7 @@
               </a:defRPr>
             </a:pPr>
             <a:r>
-              <a:t>Proposed 1.74  ·  No physics 1.23  ·  No Transformer 4.09  ·  No replay 3.97  ·  No drift detector 1.59  ·  Full retraining 1.58</a:t>
+              <a:t>Proposed 0.82  ·  No physics 1.23  ·  No Transformer 4.09  ·  No replay 3.97  ·  No drift detector 1.59  ·  Full retraining 1.58</a:t>
             </a:r>
           </a:p>
         </p:txBody>
